--- a/docs/vector-prediction-obsidian-neon.pptx
+++ b/docs/vector-prediction-obsidian-neon.pptx
@@ -3683,7 +3683,7 @@
                 </a:solidFill>
                 <a:latin typeface="Inter Display"/>
               </a:rPr>
-              <a:t>6x</a:t>
+              <a:t>~5x</a:t>
             </a:r>
           </a:p>
         </p:txBody>
@@ -5468,7 +5468,7 @@
                 </a:solidFill>
                 <a:latin typeface="JetBrains Mono"/>
               </a:rPr>
-              <a:t>10 / 12</a:t>
+              <a:t>10 / 13</a:t>
             </a:r>
           </a:p>
         </p:txBody>
@@ -5503,7 +5503,7 @@
                 </a:solidFill>
                 <a:latin typeface="JetBrains Mono"/>
               </a:rPr>
-              <a:t>Vector Legal · Hermes Agent · Osmosy</a:t>
+              <a:t>Vector Prediction · Hermes · Osmosy</a:t>
             </a:r>
           </a:p>
         </p:txBody>
@@ -6846,7 +6846,7 @@
                 </a:solidFill>
                 <a:latin typeface="JetBrains Mono"/>
               </a:rPr>
-              <a:t>11 / 12</a:t>
+              <a:t>11 / 13</a:t>
             </a:r>
           </a:p>
         </p:txBody>
@@ -6881,7 +6881,7 @@
                 </a:solidFill>
                 <a:latin typeface="JetBrains Mono"/>
               </a:rPr>
-              <a:t>Vector Legal · Hermes Agent · Osmosy</a:t>
+              <a:t>Vector Prediction · Hermes · Osmosy</a:t>
             </a:r>
           </a:p>
         </p:txBody>
@@ -7735,7 +7735,7 @@
                 </a:solidFill>
                 <a:latin typeface="JetBrains Mono"/>
               </a:rPr>
-              <a:t>12 / 12</a:t>
+              <a:t>12 / 13</a:t>
             </a:r>
           </a:p>
         </p:txBody>
@@ -7770,7 +7770,7 @@
                 </a:solidFill>
                 <a:latin typeface="JetBrains Mono"/>
               </a:rPr>
-              <a:t>Vector Legal · Hermes Agent · Osmosy</a:t>
+              <a:t>Vector Prediction · Hermes · Osmosy</a:t>
             </a:r>
           </a:p>
         </p:txBody>
@@ -9059,7 +9059,7 @@
                 </a:solidFill>
                 <a:latin typeface="JetBrains Mono"/>
               </a:rPr>
-              <a:t>2 / 12</a:t>
+              <a:t>2 / 13</a:t>
             </a:r>
           </a:p>
         </p:txBody>
@@ -9094,7 +9094,7 @@
                 </a:solidFill>
                 <a:latin typeface="JetBrains Mono"/>
               </a:rPr>
-              <a:t>Vector Legal · Hermes Agent · Osmosy</a:t>
+              <a:t>Vector Prediction · Hermes · Osmosy</a:t>
             </a:r>
           </a:p>
         </p:txBody>
@@ -10153,7 +10153,7 @@
                 </a:solidFill>
                 <a:latin typeface="JetBrains Mono"/>
               </a:rPr>
-              <a:t>3 / 12</a:t>
+              <a:t>3 / 13</a:t>
             </a:r>
           </a:p>
         </p:txBody>
@@ -10188,7 +10188,7 @@
                 </a:solidFill>
                 <a:latin typeface="JetBrains Mono"/>
               </a:rPr>
-              <a:t>Vector Legal · Hermes Agent · Osmosy</a:t>
+              <a:t>Vector Prediction · Hermes · Osmosy</a:t>
             </a:r>
           </a:p>
         </p:txBody>
@@ -11352,7 +11352,7 @@
                 </a:solidFill>
                 <a:latin typeface="JetBrains Mono"/>
               </a:rPr>
-              <a:t>4 / 12</a:t>
+              <a:t>4 / 13</a:t>
             </a:r>
           </a:p>
         </p:txBody>
@@ -11387,7 +11387,7 @@
                 </a:solidFill>
                 <a:latin typeface="JetBrains Mono"/>
               </a:rPr>
-              <a:t>Vector Legal · Hermes Agent · Osmosy</a:t>
+              <a:t>Vector Prediction · Hermes · Osmosy</a:t>
             </a:r>
           </a:p>
         </p:txBody>
@@ -12516,7 +12516,7 @@
                 </a:solidFill>
                 <a:latin typeface="JetBrains Mono"/>
               </a:rPr>
-              <a:t>5 / 12</a:t>
+              <a:t>5 / 13</a:t>
             </a:r>
           </a:p>
         </p:txBody>
@@ -12551,7 +12551,7 @@
                 </a:solidFill>
                 <a:latin typeface="JetBrains Mono"/>
               </a:rPr>
-              <a:t>Vector Legal · Hermes Agent · Osmosy</a:t>
+              <a:t>Vector Prediction · Hermes · Osmosy</a:t>
             </a:r>
           </a:p>
         </p:txBody>
@@ -14002,7 +14002,7 @@
                 </a:solidFill>
                 <a:latin typeface="JetBrains Mono"/>
               </a:rPr>
-              <a:t>6 / 12</a:t>
+              <a:t>6 / 13</a:t>
             </a:r>
           </a:p>
         </p:txBody>
@@ -14037,7 +14037,7 @@
                 </a:solidFill>
                 <a:latin typeface="JetBrains Mono"/>
               </a:rPr>
-              <a:t>Vector Legal · Hermes Agent · Osmosy</a:t>
+              <a:t>Vector Prediction · Hermes · Osmosy</a:t>
             </a:r>
           </a:p>
         </p:txBody>
@@ -14589,7 +14589,7 @@
                 </a:solidFill>
                 <a:latin typeface="Inter"/>
               </a:rPr>
-              <a:t>research_bench.py: нативная мультисерийность, past-future ковариаты за один проход (~6x быстрее), 9 квантилей</a:t>
+              <a:t>research_bench.py: нативная мультисерийность, past-future ковариаты за один проход (~5x быстрее), 9 квантилей</a:t>
             </a:r>
           </a:p>
         </p:txBody>
@@ -14786,7 +14786,7 @@
                 </a:solidFill>
                 <a:latin typeface="JetBrains Mono"/>
               </a:rPr>
-              <a:t>7 / 12</a:t>
+              <a:t>7 / 13</a:t>
             </a:r>
           </a:p>
         </p:txBody>
@@ -14821,7 +14821,7 @@
                 </a:solidFill>
                 <a:latin typeface="JetBrains Mono"/>
               </a:rPr>
-              <a:t>Vector Legal · Hermes Agent · Osmosy</a:t>
+              <a:t>Vector Prediction · Hermes · Osmosy</a:t>
             </a:r>
           </a:p>
         </p:txBody>
@@ -15950,7 +15950,7 @@
                 </a:solidFill>
                 <a:latin typeface="JetBrains Mono"/>
               </a:rPr>
-              <a:t>8 / 12</a:t>
+              <a:t>8 / 13</a:t>
             </a:r>
           </a:p>
         </p:txBody>
@@ -15985,7 +15985,7 @@
                 </a:solidFill>
                 <a:latin typeface="JetBrains Mono"/>
               </a:rPr>
-              <a:t>Vector Legal · Hermes Agent · Osmosy</a:t>
+              <a:t>Vector Prediction · Hermes · Osmosy</a:t>
             </a:r>
           </a:p>
         </p:txBody>
@@ -16519,7 +16519,7 @@
                 </a:solidFill>
                 <a:latin typeface="Inter"/>
               </a:rPr>
-              <a:t>MAE, весь горизонт (T=400)</a:t>
+              <a:t>MAE, clicks (контекст 106, горизонт 14)</a:t>
             </a:r>
           </a:p>
         </p:txBody>
@@ -16554,7 +16554,7 @@
                 </a:solidFill>
                 <a:latin typeface="JetBrains Mono"/>
               </a:rPr>
-              <a:t>0.120</a:t>
+              <a:t>33.75</a:t>
             </a:r>
           </a:p>
         </p:txBody>
@@ -16583,13 +16583,13 @@
           <a:p>
             <a:pPr algn="l"/>
             <a:r>
-              <a:rPr sz="1100" b="0" i="0">
-                <a:solidFill>
-                  <a:srgbClr val="F2F7FD"/>
+              <a:rPr sz="1100" b="1" i="0">
+                <a:solidFill>
+                  <a:srgbClr val="38B2F8"/>
                 </a:solidFill>
                 <a:latin typeface="JetBrains Mono"/>
               </a:rPr>
-              <a:t>0.107</a:t>
+              <a:t>31.42</a:t>
             </a:r>
           </a:p>
         </p:txBody>
@@ -16624,7 +16624,7 @@
                 </a:solidFill>
                 <a:latin typeface="JetBrains Mono"/>
               </a:rPr>
-              <a:t>0.128</a:t>
+              <a:t>67.77</a:t>
             </a:r>
           </a:p>
         </p:txBody>
@@ -16653,13 +16653,13 @@
           <a:p>
             <a:pPr algn="l"/>
             <a:r>
-              <a:rPr sz="1100" b="1" i="0">
-                <a:solidFill>
-                  <a:srgbClr val="38B2F8"/>
+              <a:rPr sz="1100" b="0" i="0">
+                <a:solidFill>
+                  <a:srgbClr val="F2F7FD"/>
                 </a:solidFill>
                 <a:latin typeface="JetBrains Mono"/>
               </a:rPr>
-              <a:t>0.105</a:t>
+              <a:t>40.55</a:t>
             </a:r>
           </a:p>
         </p:txBody>
@@ -16742,7 +16742,7 @@
                 </a:solidFill>
                 <a:latin typeface="Inter"/>
               </a:rPr>
-              <a:t>MAE, обычные дни</a:t>
+              <a:t>Время прогноза</a:t>
             </a:r>
           </a:p>
         </p:txBody>
@@ -16777,7 +16777,7 @@
                 </a:solidFill>
                 <a:latin typeface="JetBrains Mono"/>
               </a:rPr>
-              <a:t>0.129</a:t>
+              <a:t>0.15 с</a:t>
             </a:r>
           </a:p>
         </p:txBody>
@@ -16806,13 +16806,13 @@
           <a:p>
             <a:pPr algn="l"/>
             <a:r>
-              <a:rPr sz="1100" b="0" i="0">
-                <a:solidFill>
-                  <a:srgbClr val="F2F7FD"/>
+              <a:rPr sz="1100" b="1" i="0">
+                <a:solidFill>
+                  <a:srgbClr val="38B2F8"/>
                 </a:solidFill>
                 <a:latin typeface="JetBrains Mono"/>
               </a:rPr>
-              <a:t>0.114</a:t>
+              <a:t>1.29 с</a:t>
             </a:r>
           </a:p>
         </p:txBody>
@@ -16847,7 +16847,7 @@
                 </a:solidFill>
                 <a:latin typeface="JetBrains Mono"/>
               </a:rPr>
-              <a:t>0.134</a:t>
+              <a:t>0.22 с</a:t>
             </a:r>
           </a:p>
         </p:txBody>
@@ -16876,13 +16876,13 @@
           <a:p>
             <a:pPr algn="l"/>
             <a:r>
-              <a:rPr sz="1100" b="1" i="0">
-                <a:solidFill>
-                  <a:srgbClr val="38B2F8"/>
+              <a:rPr sz="1100" b="0" i="0">
+                <a:solidFill>
+                  <a:srgbClr val="F2F7FD"/>
                 </a:solidFill>
                 <a:latin typeface="JetBrains Mono"/>
               </a:rPr>
-              <a:t>0.108</a:t>
+              <a:t>0.24 с</a:t>
             </a:r>
           </a:p>
         </p:txBody>
@@ -16965,7 +16965,7 @@
                 </a:solidFill>
                 <a:latin typeface="Inter"/>
               </a:rPr>
-              <a:t>MAE, промо-дни (T=200, короткая история)</a:t>
+              <a:t>Ковариат промо</a:t>
             </a:r>
           </a:p>
         </p:txBody>
@@ -17000,7 +17000,7 @@
                 </a:solidFill>
                 <a:latin typeface="JetBrains Mono"/>
               </a:rPr>
-              <a:t>0.412</a:t>
+              <a:t>—</a:t>
             </a:r>
           </a:p>
         </p:txBody>
@@ -17029,13 +17029,13 @@
           <a:p>
             <a:pPr algn="l"/>
             <a:r>
-              <a:rPr sz="1100" b="0" i="0">
-                <a:solidFill>
-                  <a:srgbClr val="F2F7FD"/>
+              <a:rPr sz="1100" b="1" i="0">
+                <a:solidFill>
+                  <a:srgbClr val="38B2F8"/>
                 </a:solidFill>
                 <a:latin typeface="JetBrains Mono"/>
               </a:rPr>
-              <a:t>0.381</a:t>
+              <a:t>XReg</a:t>
             </a:r>
           </a:p>
         </p:txBody>
@@ -17070,7 +17070,7 @@
                 </a:solidFill>
                 <a:latin typeface="JetBrains Mono"/>
               </a:rPr>
-              <a:t>0.359</a:t>
+              <a:t>—</a:t>
             </a:r>
           </a:p>
         </p:txBody>
@@ -17099,13 +17099,13 @@
           <a:p>
             <a:pPr algn="l"/>
             <a:r>
-              <a:rPr sz="1100" b="1" i="0">
-                <a:solidFill>
-                  <a:srgbClr val="38B2F8"/>
+              <a:rPr sz="1100" b="0" i="0">
+                <a:solidFill>
+                  <a:srgbClr val="F2F7FD"/>
                 </a:solidFill>
                 <a:latin typeface="JetBrains Mono"/>
               </a:rPr>
-              <a:t>0.142</a:t>
+              <a:t>нативный</a:t>
             </a:r>
           </a:p>
         </p:txBody>
@@ -17188,7 +17188,7 @@
                 </a:solidFill>
                 <a:latin typeface="Inter"/>
               </a:rPr>
-              <a:t>Время, ковариатный прогноз</a:t>
+              <a:t>Лицензия весов</a:t>
             </a:r>
           </a:p>
         </p:txBody>
@@ -17223,7 +17223,7 @@
                 </a:solidFill>
                 <a:latin typeface="JetBrains Mono"/>
               </a:rPr>
-              <a:t>—</a:t>
+              <a:t>Apache-2.0</a:t>
             </a:r>
           </a:p>
         </p:txBody>
@@ -17252,13 +17252,13 @@
           <a:p>
             <a:pPr algn="l"/>
             <a:r>
-              <a:rPr sz="1100" b="0" i="0">
-                <a:solidFill>
-                  <a:srgbClr val="F2F7FD"/>
+              <a:rPr sz="1100" b="1" i="0">
+                <a:solidFill>
+                  <a:srgbClr val="38B2F8"/>
                 </a:solidFill>
                 <a:latin typeface="JetBrains Mono"/>
               </a:rPr>
-              <a:t>~1.3 с</a:t>
+              <a:t>Apache-2.0</a:t>
             </a:r>
           </a:p>
         </p:txBody>
@@ -17293,7 +17293,7 @@
                 </a:solidFill>
                 <a:latin typeface="JetBrains Mono"/>
               </a:rPr>
-              <a:t>~0.2 с</a:t>
+              <a:t>non-comm.</a:t>
             </a:r>
           </a:p>
         </p:txBody>
@@ -17322,13 +17322,13 @@
           <a:p>
             <a:pPr algn="l"/>
             <a:r>
-              <a:rPr sz="1100" b="1" i="0">
-                <a:solidFill>
-                  <a:srgbClr val="38B2F8"/>
+              <a:rPr sz="1100" b="0" i="0">
+                <a:solidFill>
+                  <a:srgbClr val="F2F7FD"/>
                 </a:solidFill>
                 <a:latin typeface="JetBrains Mono"/>
               </a:rPr>
-              <a:t>~0.23 с (6x)</a:t>
+              <a:t>non-comm.</a:t>
             </a:r>
           </a:p>
         </p:txBody>
@@ -17490,7 +17490,7 @@
                 </a:solidFill>
                 <a:latin typeface="Inter"/>
               </a:rPr>
-              <a:t>Вывод: точность сопоставима (лучший — 3.0 с ковариатом), скорость ковариатного прогноза у 3.0 в ~6 раз выше.</a:t>
+              <a:t>Вывод: на ряде из репо точнее 2.5 + XReg (MAE 31.42 против 40.55 у 3.0 с ковариатом); 3.0 быстрее в ковариатном прогнозе (~5x).</a:t>
             </a:r>
           </a:p>
         </p:txBody>
@@ -17525,7 +17525,7 @@
                 </a:solidFill>
                 <a:latin typeface="Inter"/>
               </a:rPr>
-              <a:t>Для прод-календаря акций 2.5+XReg достаточен: на выраженном промо-паттерне ошибка промо-дня близка к нулю.</a:t>
+              <a:t>Прод-выбор 2.5 оправдан и лицензией, и точностью; 3.0 — быстрый тест-прогон перед боевым расчётом на 2.5.</a:t>
             </a:r>
           </a:p>
         </p:txBody>
@@ -17560,7 +17560,7 @@
                 </a:solidFill>
                 <a:latin typeface="Inter"/>
               </a:rPr>
-              <a:t>Живой прогон 04.09.2026 на этой машине (Ryzen AI 9 H 365, 20 CPU): синтетика с сезонностью и промо +20%. Реальный ряд из репо (106 точек): 2.5+XReg MAE 31.4 vs 3.0+ковариат 40.5 — на короткой истории 2.5 выигрывает.</a:t>
+              <a:t>Повторить: research_bench.py --input data/sample/history.csv --value-col clicks (04.09.2026, Ryzen AI 9 H 365, 20 CPU).</a:t>
             </a:r>
           </a:p>
         </p:txBody>
@@ -17595,7 +17595,7 @@
                 </a:solidFill>
                 <a:latin typeface="JetBrains Mono"/>
               </a:rPr>
-              <a:t>9 / 12</a:t>
+              <a:t>9 / 13</a:t>
             </a:r>
           </a:p>
         </p:txBody>
@@ -17630,7 +17630,7 @@
                 </a:solidFill>
                 <a:latin typeface="JetBrains Mono"/>
               </a:rPr>
-              <a:t>Vector Legal · Hermes Agent · Osmosy</a:t>
+              <a:t>Vector Prediction · Hermes · Osmosy</a:t>
             </a:r>
           </a:p>
         </p:txBody>

--- a/docs/vector-prediction-obsidian-neon.pptx
+++ b/docs/vector-prediction-obsidian-neon.pptx
@@ -4323,11 +4323,11 @@
         <p:spPr>
           <a:xfrm>
             <a:off x="566928" y="2313432"/>
-            <a:ext cx="8686800" cy="475488"/>
+            <a:ext cx="8686800" cy="420624"/>
           </a:xfrm>
           <a:prstGeom prst="roundRect">
             <a:avLst>
-              <a:gd name="adj" fmla="val 17307"/>
+              <a:gd name="adj" fmla="val 19565"/>
             </a:avLst>
           </a:prstGeom>
           <a:solidFill>
@@ -4545,12 +4545,12 @@
         </p:nvSpPr>
         <p:spPr>
           <a:xfrm>
-            <a:off x="566928" y="2843784"/>
-            <a:ext cx="8686800" cy="475488"/>
+            <a:off x="566928" y="2788920"/>
+            <a:ext cx="8686800" cy="420624"/>
           </a:xfrm>
           <a:prstGeom prst="roundRect">
             <a:avLst>
-              <a:gd name="adj" fmla="val 17307"/>
+              <a:gd name="adj" fmla="val 19565"/>
             </a:avLst>
           </a:prstGeom>
           <a:solidFill>
@@ -4593,7 +4593,7 @@
         </p:nvSpPr>
         <p:spPr>
           <a:xfrm>
-            <a:off x="694944" y="2944368"/>
+            <a:off x="694944" y="2889503"/>
             <a:ext cx="1828800" cy="274320"/>
           </a:xfrm>
           <a:prstGeom prst="rect">
@@ -4628,7 +4628,7 @@
         </p:nvSpPr>
         <p:spPr>
           <a:xfrm>
-            <a:off x="2706624" y="2944368"/>
+            <a:off x="2706624" y="2889503"/>
             <a:ext cx="1554480" cy="274320"/>
           </a:xfrm>
           <a:prstGeom prst="rect">
@@ -4663,7 +4663,7 @@
         </p:nvSpPr>
         <p:spPr>
           <a:xfrm>
-            <a:off x="4443984" y="2944368"/>
+            <a:off x="4443984" y="2889503"/>
             <a:ext cx="1554480" cy="274320"/>
           </a:xfrm>
           <a:prstGeom prst="rect">
@@ -4698,7 +4698,7 @@
         </p:nvSpPr>
         <p:spPr>
           <a:xfrm>
-            <a:off x="6181344" y="2944368"/>
+            <a:off x="6181344" y="2889503"/>
             <a:ext cx="1554480" cy="274320"/>
           </a:xfrm>
           <a:prstGeom prst="rect">
@@ -4733,7 +4733,7 @@
         </p:nvSpPr>
         <p:spPr>
           <a:xfrm>
-            <a:off x="7918704" y="2944368"/>
+            <a:off x="7918704" y="2889503"/>
             <a:ext cx="1280160" cy="274320"/>
           </a:xfrm>
           <a:prstGeom prst="rect">
@@ -4768,12 +4768,12 @@
         </p:nvSpPr>
         <p:spPr>
           <a:xfrm>
-            <a:off x="566928" y="3374136"/>
-            <a:ext cx="8686800" cy="475488"/>
+            <a:off x="566928" y="3264408"/>
+            <a:ext cx="8686800" cy="420624"/>
           </a:xfrm>
           <a:prstGeom prst="roundRect">
             <a:avLst>
-              <a:gd name="adj" fmla="val 17307"/>
+              <a:gd name="adj" fmla="val 19565"/>
             </a:avLst>
           </a:prstGeom>
           <a:solidFill>
@@ -4816,7 +4816,7 @@
         </p:nvSpPr>
         <p:spPr>
           <a:xfrm>
-            <a:off x="694944" y="3474720"/>
+            <a:off x="694944" y="3364991"/>
             <a:ext cx="1828800" cy="274320"/>
           </a:xfrm>
           <a:prstGeom prst="rect">
@@ -4851,7 +4851,7 @@
         </p:nvSpPr>
         <p:spPr>
           <a:xfrm>
-            <a:off x="2706624" y="3474720"/>
+            <a:off x="2706624" y="3364991"/>
             <a:ext cx="1554480" cy="274320"/>
           </a:xfrm>
           <a:prstGeom prst="rect">
@@ -4886,7 +4886,7 @@
         </p:nvSpPr>
         <p:spPr>
           <a:xfrm>
-            <a:off x="4443984" y="3474720"/>
+            <a:off x="4443984" y="3364991"/>
             <a:ext cx="1554480" cy="274320"/>
           </a:xfrm>
           <a:prstGeom prst="rect">
@@ -4921,7 +4921,7 @@
         </p:nvSpPr>
         <p:spPr>
           <a:xfrm>
-            <a:off x="6181344" y="3474720"/>
+            <a:off x="6181344" y="3364991"/>
             <a:ext cx="1554480" cy="274320"/>
           </a:xfrm>
           <a:prstGeom prst="rect">
@@ -4956,7 +4956,7 @@
         </p:nvSpPr>
         <p:spPr>
           <a:xfrm>
-            <a:off x="7918704" y="3474720"/>
+            <a:off x="7918704" y="3364991"/>
             <a:ext cx="1280160" cy="274320"/>
           </a:xfrm>
           <a:prstGeom prst="rect">
@@ -4991,12 +4991,12 @@
         </p:nvSpPr>
         <p:spPr>
           <a:xfrm>
-            <a:off x="566928" y="3904487"/>
-            <a:ext cx="8686800" cy="475488"/>
+            <a:off x="566928" y="3739896"/>
+            <a:ext cx="8686800" cy="420624"/>
           </a:xfrm>
           <a:prstGeom prst="roundRect">
             <a:avLst>
-              <a:gd name="adj" fmla="val 17307"/>
+              <a:gd name="adj" fmla="val 19565"/>
             </a:avLst>
           </a:prstGeom>
           <a:solidFill>
@@ -5039,7 +5039,7 @@
         </p:nvSpPr>
         <p:spPr>
           <a:xfrm>
-            <a:off x="694944" y="4005072"/>
+            <a:off x="694944" y="3840480"/>
             <a:ext cx="1828800" cy="274320"/>
           </a:xfrm>
           <a:prstGeom prst="rect">
@@ -5074,7 +5074,7 @@
         </p:nvSpPr>
         <p:spPr>
           <a:xfrm>
-            <a:off x="2706624" y="4005072"/>
+            <a:off x="2706624" y="3840480"/>
             <a:ext cx="1554480" cy="274320"/>
           </a:xfrm>
           <a:prstGeom prst="rect">
@@ -5109,7 +5109,7 @@
         </p:nvSpPr>
         <p:spPr>
           <a:xfrm>
-            <a:off x="4443984" y="4005072"/>
+            <a:off x="4443984" y="3840480"/>
             <a:ext cx="1554480" cy="274320"/>
           </a:xfrm>
           <a:prstGeom prst="rect">
@@ -5144,7 +5144,7 @@
         </p:nvSpPr>
         <p:spPr>
           <a:xfrm>
-            <a:off x="6181344" y="4005072"/>
+            <a:off x="6181344" y="3840480"/>
             <a:ext cx="1554480" cy="274320"/>
           </a:xfrm>
           <a:prstGeom prst="rect">
@@ -5179,7 +5179,7 @@
         </p:nvSpPr>
         <p:spPr>
           <a:xfrm>
-            <a:off x="7918704" y="4005072"/>
+            <a:off x="7918704" y="3840480"/>
             <a:ext cx="1280160" cy="274320"/>
           </a:xfrm>
           <a:prstGeom prst="rect">
@@ -5214,12 +5214,12 @@
         </p:nvSpPr>
         <p:spPr>
           <a:xfrm>
-            <a:off x="566928" y="4434840"/>
-            <a:ext cx="11064240" cy="2148840"/>
+            <a:off x="566928" y="4498848"/>
+            <a:ext cx="11064240" cy="1920240"/>
           </a:xfrm>
           <a:prstGeom prst="roundRect">
             <a:avLst>
-              <a:gd name="adj" fmla="val 3829"/>
+              <a:gd name="adj" fmla="val 4285"/>
             </a:avLst>
           </a:prstGeom>
           <a:solidFill>
@@ -5262,8 +5262,8 @@
         </p:nvSpPr>
         <p:spPr>
           <a:xfrm>
-            <a:off x="566928" y="4434840"/>
-            <a:ext cx="45720" cy="2148840"/>
+            <a:off x="566928" y="4498848"/>
+            <a:ext cx="45720" cy="1920240"/>
           </a:xfrm>
           <a:prstGeom prst="rect">
             <a:avLst/>
@@ -5306,7 +5306,7 @@
         </p:nvSpPr>
         <p:spPr>
           <a:xfrm>
-            <a:off x="859536" y="4654296"/>
+            <a:off x="859536" y="4718304"/>
             <a:ext cx="10424160" cy="320040"/>
           </a:xfrm>
           <a:prstGeom prst="rect">
@@ -5341,7 +5341,42 @@
         </p:nvSpPr>
         <p:spPr>
           <a:xfrm>
-            <a:off x="859536" y="5056631"/>
+            <a:off x="859536" y="5120640"/>
+            <a:ext cx="10424160" cy="448056"/>
+          </a:xfrm>
+          <a:prstGeom prst="rect">
+            <a:avLst/>
+          </a:prstGeom>
+          <a:noFill/>
+        </p:spPr>
+        <p:txBody>
+          <a:bodyPr wrap="square" anchor="t" lIns="0" rIns="0" tIns="0" bIns="0">
+            <a:spAutoFit/>
+          </a:bodyPr>
+          <a:lstStyle/>
+          <a:p>
+            <a:pPr algn="l"/>
+            <a:r>
+              <a:rPr sz="1150" b="0" i="0">
+                <a:solidFill>
+                  <a:srgbClr val="F2F7FD"/>
+                </a:solidFill>
+                <a:latin typeface="Inter"/>
+              </a:rPr>
+              <a:t>forecast — план производства/закупки по умолчанию. cautious (10-й перцентиль) — нижняя граница: скоропорт ближе к ней. optimistic (90-й) — запас для заморозки и долгих сроков.</a:t>
+            </a:r>
+          </a:p>
+        </p:txBody>
+      </p:sp>
+      <p:sp>
+        <p:nvSpPr>
+          <p:cNvPr id="41" name="TextBox 40"/>
+          <p:cNvSpPr txBox="1"/>
+          <p:nvPr/>
+        </p:nvSpPr>
+        <p:spPr>
+          <a:xfrm>
+            <a:off x="859536" y="5568696"/>
             <a:ext cx="10424160" cy="274320"/>
           </a:xfrm>
           <a:prstGeom prst="rect">
@@ -5359,45 +5394,10 @@
             <a:r>
               <a:rPr sz="1150" b="0" i="0">
                 <a:solidFill>
-                  <a:srgbClr val="F2F7FD"/>
+                  <a:srgbClr val="8FA3BC"/>
                 </a:solidFill>
                 <a:latin typeface="Inter"/>
               </a:rPr>
-              <a:t>forecast — план производства/закупки по умолчанию. cautious (10-й перцентиль) — нижняя граница: скоропорт ближе к ней. optimistic (90-й) — запас для заморозки и долгих сроков.</a:t>
-            </a:r>
-          </a:p>
-        </p:txBody>
-      </p:sp>
-      <p:sp>
-        <p:nvSpPr>
-          <p:cNvPr id="41" name="TextBox 40"/>
-          <p:cNvSpPr txBox="1"/>
-          <p:nvPr/>
-        </p:nvSpPr>
-        <p:spPr>
-          <a:xfrm>
-            <a:off x="859536" y="5330951"/>
-            <a:ext cx="10424160" cy="274320"/>
-          </a:xfrm>
-          <a:prstGeom prst="rect">
-            <a:avLst/>
-          </a:prstGeom>
-          <a:noFill/>
-        </p:spPr>
-        <p:txBody>
-          <a:bodyPr wrap="square" anchor="t" lIns="0" rIns="0" tIns="0" bIns="0">
-            <a:spAutoFit/>
-          </a:bodyPr>
-          <a:lstStyle/>
-          <a:p>
-            <a:pPr algn="l"/>
-            <a:r>
-              <a:rPr sz="1150" b="0" i="0">
-                <a:solidFill>
-                  <a:srgbClr val="8FA3BC"/>
-                </a:solidFill>
-                <a:latin typeface="Inter"/>
-              </a:rPr>
               <a:t>В промо-дни (5–6 сентября) модель подняла прогноз заранее — календарь акций из плана сработал.</a:t>
             </a:r>
           </a:p>
@@ -5411,8 +5411,8 @@
         </p:nvSpPr>
         <p:spPr>
           <a:xfrm>
-            <a:off x="859536" y="5605271"/>
-            <a:ext cx="10424160" cy="274320"/>
+            <a:off x="859536" y="5843016"/>
+            <a:ext cx="10424160" cy="448056"/>
           </a:xfrm>
           <a:prstGeom prst="rect">
             <a:avLst/>
@@ -5481,8 +5481,8 @@
         </p:nvSpPr>
         <p:spPr>
           <a:xfrm>
-            <a:off x="8778240" y="6528816"/>
-            <a:ext cx="2834640" cy="228600"/>
+            <a:off x="7498079" y="6528816"/>
+            <a:ext cx="4114800" cy="228600"/>
           </a:xfrm>
           <a:prstGeom prst="rect">
             <a:avLst/>
@@ -5503,7 +5503,7 @@
                 </a:solidFill>
                 <a:latin typeface="JetBrains Mono"/>
               </a:rPr>
-              <a:t>Vector Prediction · Hermes · Osmosy</a:t>
+              <a:t>Vector Prediction · Hermes Agent · Osmosy</a:t>
             </a:r>
           </a:p>
         </p:txBody>
@@ -5898,11 +5898,11 @@
         <p:spPr>
           <a:xfrm>
             <a:off x="566928" y="2313432"/>
-            <a:ext cx="11064240" cy="566928"/>
+            <a:ext cx="11064240" cy="512064"/>
           </a:xfrm>
           <a:prstGeom prst="roundRect">
             <a:avLst>
-              <a:gd name="adj" fmla="val 14516"/>
+              <a:gd name="adj" fmla="val 16071"/>
             </a:avLst>
           </a:prstGeom>
           <a:solidFill>
@@ -6050,12 +6050,12 @@
         </p:nvSpPr>
         <p:spPr>
           <a:xfrm>
-            <a:off x="566928" y="2935224"/>
-            <a:ext cx="11064240" cy="566928"/>
+            <a:off x="566928" y="2880360"/>
+            <a:ext cx="11064240" cy="512064"/>
           </a:xfrm>
           <a:prstGeom prst="roundRect">
             <a:avLst>
-              <a:gd name="adj" fmla="val 14516"/>
+              <a:gd name="adj" fmla="val 16071"/>
             </a:avLst>
           </a:prstGeom>
           <a:solidFill>
@@ -6098,7 +6098,7 @@
         </p:nvSpPr>
         <p:spPr>
           <a:xfrm>
-            <a:off x="694944" y="3035808"/>
+            <a:off x="694944" y="2980944"/>
             <a:ext cx="1828800" cy="274320"/>
           </a:xfrm>
           <a:prstGeom prst="rect">
@@ -6133,7 +6133,7 @@
         </p:nvSpPr>
         <p:spPr>
           <a:xfrm>
-            <a:off x="2706624" y="3035808"/>
+            <a:off x="2706624" y="2980944"/>
             <a:ext cx="4937759" cy="274320"/>
           </a:xfrm>
           <a:prstGeom prst="rect">
@@ -6168,7 +6168,7 @@
         </p:nvSpPr>
         <p:spPr>
           <a:xfrm>
-            <a:off x="7827264" y="3035808"/>
+            <a:off x="7827264" y="2980944"/>
             <a:ext cx="3749039" cy="274320"/>
           </a:xfrm>
           <a:prstGeom prst="rect">
@@ -6203,12 +6203,12 @@
         </p:nvSpPr>
         <p:spPr>
           <a:xfrm>
-            <a:off x="566928" y="3557015"/>
-            <a:ext cx="11064240" cy="566928"/>
+            <a:off x="566928" y="3447288"/>
+            <a:ext cx="11064240" cy="512064"/>
           </a:xfrm>
           <a:prstGeom prst="roundRect">
             <a:avLst>
-              <a:gd name="adj" fmla="val 14516"/>
+              <a:gd name="adj" fmla="val 16071"/>
             </a:avLst>
           </a:prstGeom>
           <a:solidFill>
@@ -6251,7 +6251,7 @@
         </p:nvSpPr>
         <p:spPr>
           <a:xfrm>
-            <a:off x="694944" y="3657599"/>
+            <a:off x="694944" y="3547872"/>
             <a:ext cx="1828800" cy="274320"/>
           </a:xfrm>
           <a:prstGeom prst="rect">
@@ -6286,7 +6286,7 @@
         </p:nvSpPr>
         <p:spPr>
           <a:xfrm>
-            <a:off x="2706624" y="3657599"/>
+            <a:off x="2706624" y="3547872"/>
             <a:ext cx="4937759" cy="274320"/>
           </a:xfrm>
           <a:prstGeom prst="rect">
@@ -6321,7 +6321,7 @@
         </p:nvSpPr>
         <p:spPr>
           <a:xfrm>
-            <a:off x="7827264" y="3657599"/>
+            <a:off x="7827264" y="3547872"/>
             <a:ext cx="3749039" cy="274320"/>
           </a:xfrm>
           <a:prstGeom prst="rect">
@@ -6356,12 +6356,12 @@
         </p:nvSpPr>
         <p:spPr>
           <a:xfrm>
-            <a:off x="566928" y="4178807"/>
-            <a:ext cx="11064240" cy="566928"/>
+            <a:off x="566928" y="4014216"/>
+            <a:ext cx="11064240" cy="512064"/>
           </a:xfrm>
           <a:prstGeom prst="roundRect">
             <a:avLst>
-              <a:gd name="adj" fmla="val 14516"/>
+              <a:gd name="adj" fmla="val 16071"/>
             </a:avLst>
           </a:prstGeom>
           <a:solidFill>
@@ -6404,7 +6404,7 @@
         </p:nvSpPr>
         <p:spPr>
           <a:xfrm>
-            <a:off x="694944" y="4279392"/>
+            <a:off x="694944" y="4114800"/>
             <a:ext cx="1828800" cy="274320"/>
           </a:xfrm>
           <a:prstGeom prst="rect">
@@ -6439,7 +6439,7 @@
         </p:nvSpPr>
         <p:spPr>
           <a:xfrm>
-            <a:off x="2706624" y="4279392"/>
+            <a:off x="2706624" y="4114800"/>
             <a:ext cx="4937759" cy="274320"/>
           </a:xfrm>
           <a:prstGeom prst="rect">
@@ -6474,7 +6474,7 @@
         </p:nvSpPr>
         <p:spPr>
           <a:xfrm>
-            <a:off x="7827264" y="4279392"/>
+            <a:off x="7827264" y="4114800"/>
             <a:ext cx="3749039" cy="274320"/>
           </a:xfrm>
           <a:prstGeom prst="rect">
@@ -6509,12 +6509,12 @@
         </p:nvSpPr>
         <p:spPr>
           <a:xfrm>
-            <a:off x="566928" y="4800599"/>
-            <a:ext cx="11064240" cy="566928"/>
+            <a:off x="566928" y="4581144"/>
+            <a:ext cx="11064240" cy="512064"/>
           </a:xfrm>
           <a:prstGeom prst="roundRect">
             <a:avLst>
-              <a:gd name="adj" fmla="val 14516"/>
+              <a:gd name="adj" fmla="val 16071"/>
             </a:avLst>
           </a:prstGeom>
           <a:solidFill>
@@ -6557,7 +6557,7 @@
         </p:nvSpPr>
         <p:spPr>
           <a:xfrm>
-            <a:off x="694944" y="4901183"/>
+            <a:off x="694944" y="4681728"/>
             <a:ext cx="1828800" cy="274320"/>
           </a:xfrm>
           <a:prstGeom prst="rect">
@@ -6592,7 +6592,7 @@
         </p:nvSpPr>
         <p:spPr>
           <a:xfrm>
-            <a:off x="2706624" y="4901183"/>
+            <a:off x="2706624" y="4681728"/>
             <a:ext cx="4937759" cy="274320"/>
           </a:xfrm>
           <a:prstGeom prst="rect">
@@ -6627,7 +6627,7 @@
         </p:nvSpPr>
         <p:spPr>
           <a:xfrm>
-            <a:off x="7827264" y="4901183"/>
+            <a:off x="7827264" y="4681728"/>
             <a:ext cx="3749039" cy="274320"/>
           </a:xfrm>
           <a:prstGeom prst="rect">
@@ -6662,12 +6662,12 @@
         </p:nvSpPr>
         <p:spPr>
           <a:xfrm>
-            <a:off x="566928" y="5532120"/>
-            <a:ext cx="11064240" cy="1097280"/>
+            <a:off x="566928" y="5394959"/>
+            <a:ext cx="11064240" cy="1024128"/>
           </a:xfrm>
           <a:prstGeom prst="roundRect">
             <a:avLst>
-              <a:gd name="adj" fmla="val 7500"/>
+              <a:gd name="adj" fmla="val 8035"/>
             </a:avLst>
           </a:prstGeom>
           <a:solidFill>
@@ -6710,8 +6710,8 @@
         </p:nvSpPr>
         <p:spPr>
           <a:xfrm>
-            <a:off x="566928" y="5532120"/>
-            <a:ext cx="45720" cy="1097280"/>
+            <a:off x="566928" y="5394959"/>
+            <a:ext cx="45720" cy="1024128"/>
           </a:xfrm>
           <a:prstGeom prst="rect">
             <a:avLst/>
@@ -6754,7 +6754,7 @@
         </p:nvSpPr>
         <p:spPr>
           <a:xfrm>
-            <a:off x="859536" y="5751576"/>
+            <a:off x="859536" y="5614416"/>
             <a:ext cx="10424160" cy="320040"/>
           </a:xfrm>
           <a:prstGeom prst="rect">
@@ -6789,7 +6789,7 @@
         </p:nvSpPr>
         <p:spPr>
           <a:xfrm>
-            <a:off x="859536" y="6153912"/>
+            <a:off x="859536" y="6016751"/>
             <a:ext cx="10424160" cy="274320"/>
           </a:xfrm>
           <a:prstGeom prst="rect">
@@ -6859,8 +6859,8 @@
         </p:nvSpPr>
         <p:spPr>
           <a:xfrm>
-            <a:off x="8778240" y="6528816"/>
-            <a:ext cx="2834640" cy="228600"/>
+            <a:off x="7498079" y="6528816"/>
+            <a:ext cx="4114800" cy="228600"/>
           </a:xfrm>
           <a:prstGeom prst="rect">
             <a:avLst/>
@@ -6881,7 +6881,7 @@
                 </a:solidFill>
                 <a:latin typeface="JetBrains Mono"/>
               </a:rPr>
-              <a:t>Vector Prediction · Hermes · Osmosy</a:t>
+              <a:t>Vector Prediction · Hermes Agent · Osmosy</a:t>
             </a:r>
           </a:p>
         </p:txBody>
@@ -7122,12 +7122,12 @@
         </p:nvSpPr>
         <p:spPr>
           <a:xfrm>
-            <a:off x="566928" y="1783080"/>
-            <a:ext cx="11064240" cy="914400"/>
+            <a:off x="566928" y="1874519"/>
+            <a:ext cx="11064240" cy="1298448"/>
           </a:xfrm>
           <a:prstGeom prst="roundRect">
             <a:avLst>
-              <a:gd name="adj" fmla="val 9000"/>
+              <a:gd name="adj" fmla="val 6338"/>
             </a:avLst>
           </a:prstGeom>
           <a:solidFill>
@@ -7170,8 +7170,8 @@
         </p:nvSpPr>
         <p:spPr>
           <a:xfrm>
-            <a:off x="566928" y="1783080"/>
-            <a:ext cx="45720" cy="914400"/>
+            <a:off x="566928" y="1874519"/>
+            <a:ext cx="45720" cy="1298448"/>
           </a:xfrm>
           <a:prstGeom prst="rect">
             <a:avLst/>
@@ -7214,7 +7214,7 @@
         </p:nvSpPr>
         <p:spPr>
           <a:xfrm>
-            <a:off x="859536" y="2002536"/>
+            <a:off x="859536" y="2093976"/>
             <a:ext cx="10424160" cy="320040"/>
           </a:xfrm>
           <a:prstGeom prst="rect">
@@ -7249,7 +7249,7 @@
         </p:nvSpPr>
         <p:spPr>
           <a:xfrm>
-            <a:off x="859536" y="2404872"/>
+            <a:off x="859536" y="2496312"/>
             <a:ext cx="10424160" cy="274320"/>
           </a:xfrm>
           <a:prstGeom prst="rect">
@@ -7284,7 +7284,7 @@
         </p:nvSpPr>
         <p:spPr>
           <a:xfrm>
-            <a:off x="859536" y="2679191"/>
+            <a:off x="859536" y="2770632"/>
             <a:ext cx="10424160" cy="274320"/>
           </a:xfrm>
           <a:prstGeom prst="rect">
@@ -7319,12 +7319,12 @@
         </p:nvSpPr>
         <p:spPr>
           <a:xfrm>
-            <a:off x="566928" y="2880360"/>
-            <a:ext cx="11064240" cy="1280160"/>
+            <a:off x="566928" y="3337560"/>
+            <a:ext cx="11064240" cy="1298448"/>
           </a:xfrm>
           <a:prstGeom prst="roundRect">
             <a:avLst>
-              <a:gd name="adj" fmla="val 6428"/>
+              <a:gd name="adj" fmla="val 6338"/>
             </a:avLst>
           </a:prstGeom>
           <a:solidFill>
@@ -7367,8 +7367,8 @@
         </p:nvSpPr>
         <p:spPr>
           <a:xfrm>
-            <a:off x="566928" y="2880360"/>
-            <a:ext cx="45720" cy="1280160"/>
+            <a:off x="566928" y="3337560"/>
+            <a:ext cx="45720" cy="1298448"/>
           </a:xfrm>
           <a:prstGeom prst="rect">
             <a:avLst/>
@@ -7411,7 +7411,7 @@
         </p:nvSpPr>
         <p:spPr>
           <a:xfrm>
-            <a:off x="859536" y="3099815"/>
+            <a:off x="859536" y="3557015"/>
             <a:ext cx="10424160" cy="320040"/>
           </a:xfrm>
           <a:prstGeom prst="rect">
@@ -7446,7 +7446,7 @@
         </p:nvSpPr>
         <p:spPr>
           <a:xfrm>
-            <a:off x="859536" y="3502152"/>
+            <a:off x="859536" y="3959352"/>
             <a:ext cx="10424160" cy="274320"/>
           </a:xfrm>
           <a:prstGeom prst="rect">
@@ -7481,7 +7481,7 @@
         </p:nvSpPr>
         <p:spPr>
           <a:xfrm>
-            <a:off x="859536" y="3776472"/>
+            <a:off x="859536" y="4233672"/>
             <a:ext cx="10424160" cy="274320"/>
           </a:xfrm>
           <a:prstGeom prst="rect">
@@ -7516,12 +7516,12 @@
         </p:nvSpPr>
         <p:spPr>
           <a:xfrm>
-            <a:off x="566928" y="4343400"/>
-            <a:ext cx="11064240" cy="1005840"/>
+            <a:off x="566928" y="4800600"/>
+            <a:ext cx="11064240" cy="1298448"/>
           </a:xfrm>
           <a:prstGeom prst="roundRect">
             <a:avLst>
-              <a:gd name="adj" fmla="val 8181"/>
+              <a:gd name="adj" fmla="val 6338"/>
             </a:avLst>
           </a:prstGeom>
           <a:solidFill>
@@ -7564,8 +7564,8 @@
         </p:nvSpPr>
         <p:spPr>
           <a:xfrm>
-            <a:off x="566928" y="4343400"/>
-            <a:ext cx="45720" cy="1005840"/>
+            <a:off x="566928" y="4800600"/>
+            <a:ext cx="45720" cy="1298448"/>
           </a:xfrm>
           <a:prstGeom prst="rect">
             <a:avLst/>
@@ -7608,7 +7608,7 @@
         </p:nvSpPr>
         <p:spPr>
           <a:xfrm>
-            <a:off x="859536" y="4562856"/>
+            <a:off x="859536" y="5020056"/>
             <a:ext cx="10424160" cy="320040"/>
           </a:xfrm>
           <a:prstGeom prst="rect">
@@ -7643,7 +7643,7 @@
         </p:nvSpPr>
         <p:spPr>
           <a:xfrm>
-            <a:off x="859536" y="4965192"/>
+            <a:off x="859536" y="5422392"/>
             <a:ext cx="10424160" cy="274320"/>
           </a:xfrm>
           <a:prstGeom prst="rect">
@@ -7678,7 +7678,7 @@
         </p:nvSpPr>
         <p:spPr>
           <a:xfrm>
-            <a:off x="859536" y="5239512"/>
+            <a:off x="859536" y="5696712"/>
             <a:ext cx="10424160" cy="274320"/>
           </a:xfrm>
           <a:prstGeom prst="rect">
@@ -7748,8 +7748,8 @@
         </p:nvSpPr>
         <p:spPr>
           <a:xfrm>
-            <a:off x="8778240" y="6528816"/>
-            <a:ext cx="2834640" cy="228600"/>
+            <a:off x="7498079" y="6528816"/>
+            <a:ext cx="4114800" cy="228600"/>
           </a:xfrm>
           <a:prstGeom prst="rect">
             <a:avLst/>
@@ -7770,7 +7770,7 @@
                 </a:solidFill>
                 <a:latin typeface="JetBrains Mono"/>
               </a:rPr>
-              <a:t>Vector Prediction · Hermes · Osmosy</a:t>
+              <a:t>Vector Prediction · Hermes Agent · Osmosy</a:t>
             </a:r>
           </a:p>
         </p:txBody>
@@ -9072,8 +9072,8 @@
         </p:nvSpPr>
         <p:spPr>
           <a:xfrm>
-            <a:off x="8778240" y="6528816"/>
-            <a:ext cx="2834640" cy="228600"/>
+            <a:off x="7498079" y="6528816"/>
+            <a:ext cx="4114800" cy="228600"/>
           </a:xfrm>
           <a:prstGeom prst="rect">
             <a:avLst/>
@@ -9094,7 +9094,7 @@
                 </a:solidFill>
                 <a:latin typeface="JetBrains Mono"/>
               </a:rPr>
-              <a:t>Vector Prediction · Hermes · Osmosy</a:t>
+              <a:t>Vector Prediction · Hermes Agent · Osmosy</a:t>
             </a:r>
           </a:p>
         </p:txBody>
@@ -9336,11 +9336,11 @@
         <p:spPr>
           <a:xfrm>
             <a:off x="566928" y="1965960"/>
-            <a:ext cx="3611880" cy="2834640"/>
+            <a:ext cx="3611880" cy="2514600"/>
           </a:xfrm>
           <a:prstGeom prst="roundRect">
             <a:avLst>
-              <a:gd name="adj" fmla="val 2903"/>
+              <a:gd name="adj" fmla="val 3272"/>
             </a:avLst>
           </a:prstGeom>
           <a:solidFill>
@@ -9524,11 +9524,11 @@
         <p:spPr>
           <a:xfrm>
             <a:off x="4407408" y="1965960"/>
-            <a:ext cx="3611880" cy="2834640"/>
+            <a:ext cx="3611880" cy="2514600"/>
           </a:xfrm>
           <a:prstGeom prst="roundRect">
             <a:avLst>
-              <a:gd name="adj" fmla="val 2903"/>
+              <a:gd name="adj" fmla="val 3272"/>
             </a:avLst>
           </a:prstGeom>
           <a:solidFill>
@@ -9712,11 +9712,11 @@
         <p:spPr>
           <a:xfrm>
             <a:off x="8247888" y="1965960"/>
-            <a:ext cx="3611880" cy="2834640"/>
+            <a:ext cx="3611880" cy="2514600"/>
           </a:xfrm>
           <a:prstGeom prst="roundRect">
             <a:avLst>
-              <a:gd name="adj" fmla="val 2903"/>
+              <a:gd name="adj" fmla="val 3272"/>
             </a:avLst>
           </a:prstGeom>
           <a:solidFill>
@@ -9899,12 +9899,12 @@
         </p:nvSpPr>
         <p:spPr>
           <a:xfrm>
-            <a:off x="566928" y="5074920"/>
-            <a:ext cx="11064240" cy="1691640"/>
+            <a:off x="566928" y="4846319"/>
+            <a:ext cx="11064240" cy="1572768"/>
           </a:xfrm>
           <a:prstGeom prst="roundRect">
             <a:avLst>
-              <a:gd name="adj" fmla="val 4864"/>
+              <a:gd name="adj" fmla="val 5232"/>
             </a:avLst>
           </a:prstGeom>
           <a:solidFill>
@@ -9947,8 +9947,8 @@
         </p:nvSpPr>
         <p:spPr>
           <a:xfrm>
-            <a:off x="566928" y="5074920"/>
-            <a:ext cx="45720" cy="1691640"/>
+            <a:off x="566928" y="4846319"/>
+            <a:ext cx="45720" cy="1572768"/>
           </a:xfrm>
           <a:prstGeom prst="rect">
             <a:avLst/>
@@ -9991,7 +9991,7 @@
         </p:nvSpPr>
         <p:spPr>
           <a:xfrm>
-            <a:off x="859536" y="5294376"/>
+            <a:off x="859536" y="5065775"/>
             <a:ext cx="10424160" cy="320040"/>
           </a:xfrm>
           <a:prstGeom prst="rect">
@@ -10026,7 +10026,7 @@
         </p:nvSpPr>
         <p:spPr>
           <a:xfrm>
-            <a:off x="859536" y="5696712"/>
+            <a:off x="859536" y="5468111"/>
             <a:ext cx="10424160" cy="274320"/>
           </a:xfrm>
           <a:prstGeom prst="rect">
@@ -10061,7 +10061,7 @@
         </p:nvSpPr>
         <p:spPr>
           <a:xfrm>
-            <a:off x="859536" y="5971031"/>
+            <a:off x="859536" y="5742431"/>
             <a:ext cx="10424160" cy="274320"/>
           </a:xfrm>
           <a:prstGeom prst="rect">
@@ -10096,7 +10096,7 @@
         </p:nvSpPr>
         <p:spPr>
           <a:xfrm>
-            <a:off x="859536" y="6245351"/>
+            <a:off x="859536" y="6016751"/>
             <a:ext cx="10424160" cy="274320"/>
           </a:xfrm>
           <a:prstGeom prst="rect">
@@ -10166,8 +10166,8 @@
         </p:nvSpPr>
         <p:spPr>
           <a:xfrm>
-            <a:off x="8778240" y="6528816"/>
-            <a:ext cx="2834640" cy="228600"/>
+            <a:off x="7498079" y="6528816"/>
+            <a:ext cx="4114800" cy="228600"/>
           </a:xfrm>
           <a:prstGeom prst="rect">
             <a:avLst/>
@@ -10188,7 +10188,7 @@
                 </a:solidFill>
                 <a:latin typeface="JetBrains Mono"/>
               </a:rPr>
-              <a:t>Vector Prediction · Hermes · Osmosy</a:t>
+              <a:t>Vector Prediction · Hermes Agent · Osmosy</a:t>
             </a:r>
           </a:p>
         </p:txBody>
@@ -10430,11 +10430,11 @@
         <p:spPr>
           <a:xfrm>
             <a:off x="566928" y="1965960"/>
-            <a:ext cx="3611880" cy="2834640"/>
+            <a:ext cx="3611880" cy="2514600"/>
           </a:xfrm>
           <a:prstGeom prst="roundRect">
             <a:avLst>
-              <a:gd name="adj" fmla="val 2903"/>
+              <a:gd name="adj" fmla="val 3272"/>
             </a:avLst>
           </a:prstGeom>
           <a:solidFill>
@@ -10653,11 +10653,11 @@
         <p:spPr>
           <a:xfrm>
             <a:off x="4407408" y="1965960"/>
-            <a:ext cx="3611880" cy="2834640"/>
+            <a:ext cx="3611880" cy="2514600"/>
           </a:xfrm>
           <a:prstGeom prst="roundRect">
             <a:avLst>
-              <a:gd name="adj" fmla="val 2903"/>
+              <a:gd name="adj" fmla="val 3272"/>
             </a:avLst>
           </a:prstGeom>
           <a:solidFill>
@@ -10876,11 +10876,11 @@
         <p:spPr>
           <a:xfrm>
             <a:off x="8247888" y="1965960"/>
-            <a:ext cx="3611880" cy="2834640"/>
+            <a:ext cx="3611880" cy="2514600"/>
           </a:xfrm>
           <a:prstGeom prst="roundRect">
             <a:avLst>
-              <a:gd name="adj" fmla="val 2903"/>
+              <a:gd name="adj" fmla="val 3272"/>
             </a:avLst>
           </a:prstGeom>
           <a:solidFill>
@@ -11098,12 +11098,12 @@
         </p:nvSpPr>
         <p:spPr>
           <a:xfrm>
-            <a:off x="566928" y="5074920"/>
-            <a:ext cx="11064240" cy="1691640"/>
+            <a:off x="566928" y="4846319"/>
+            <a:ext cx="11064240" cy="1572768"/>
           </a:xfrm>
           <a:prstGeom prst="roundRect">
             <a:avLst>
-              <a:gd name="adj" fmla="val 4864"/>
+              <a:gd name="adj" fmla="val 5232"/>
             </a:avLst>
           </a:prstGeom>
           <a:solidFill>
@@ -11146,8 +11146,8 @@
         </p:nvSpPr>
         <p:spPr>
           <a:xfrm>
-            <a:off x="566928" y="5074920"/>
-            <a:ext cx="45720" cy="1691640"/>
+            <a:off x="566928" y="4846319"/>
+            <a:ext cx="45720" cy="1572768"/>
           </a:xfrm>
           <a:prstGeom prst="rect">
             <a:avLst/>
@@ -11190,7 +11190,7 @@
         </p:nvSpPr>
         <p:spPr>
           <a:xfrm>
-            <a:off x="859536" y="5294376"/>
+            <a:off x="859536" y="5065775"/>
             <a:ext cx="10424160" cy="320040"/>
           </a:xfrm>
           <a:prstGeom prst="rect">
@@ -11225,7 +11225,7 @@
         </p:nvSpPr>
         <p:spPr>
           <a:xfrm>
-            <a:off x="859536" y="5696712"/>
+            <a:off x="859536" y="5468111"/>
             <a:ext cx="10424160" cy="274320"/>
           </a:xfrm>
           <a:prstGeom prst="rect">
@@ -11260,7 +11260,7 @@
         </p:nvSpPr>
         <p:spPr>
           <a:xfrm>
-            <a:off x="859536" y="5971031"/>
+            <a:off x="859536" y="5742431"/>
             <a:ext cx="10424160" cy="274320"/>
           </a:xfrm>
           <a:prstGeom prst="rect">
@@ -11295,7 +11295,7 @@
         </p:nvSpPr>
         <p:spPr>
           <a:xfrm>
-            <a:off x="859536" y="6245351"/>
+            <a:off x="859536" y="6016751"/>
             <a:ext cx="10424160" cy="274320"/>
           </a:xfrm>
           <a:prstGeom prst="rect">
@@ -11365,8 +11365,8 @@
         </p:nvSpPr>
         <p:spPr>
           <a:xfrm>
-            <a:off x="8778240" y="6528816"/>
-            <a:ext cx="2834640" cy="228600"/>
+            <a:off x="7498079" y="6528816"/>
+            <a:ext cx="4114800" cy="228600"/>
           </a:xfrm>
           <a:prstGeom prst="rect">
             <a:avLst/>
@@ -11387,7 +11387,7 @@
                 </a:solidFill>
                 <a:latin typeface="JetBrains Mono"/>
               </a:rPr>
-              <a:t>Vector Prediction · Hermes · Osmosy</a:t>
+              <a:t>Vector Prediction · Hermes Agent · Osmosy</a:t>
             </a:r>
           </a:p>
         </p:txBody>
@@ -11629,11 +11629,11 @@
         <p:spPr>
           <a:xfrm>
             <a:off x="566928" y="1965960"/>
-            <a:ext cx="3611880" cy="2834640"/>
+            <a:ext cx="3611880" cy="2514600"/>
           </a:xfrm>
           <a:prstGeom prst="roundRect">
             <a:avLst>
-              <a:gd name="adj" fmla="val 2903"/>
+              <a:gd name="adj" fmla="val 3272"/>
             </a:avLst>
           </a:prstGeom>
           <a:solidFill>
@@ -11852,11 +11852,11 @@
         <p:spPr>
           <a:xfrm>
             <a:off x="4407408" y="1965960"/>
-            <a:ext cx="3611880" cy="2834640"/>
+            <a:ext cx="3611880" cy="2514600"/>
           </a:xfrm>
           <a:prstGeom prst="roundRect">
             <a:avLst>
-              <a:gd name="adj" fmla="val 2903"/>
+              <a:gd name="adj" fmla="val 3272"/>
             </a:avLst>
           </a:prstGeom>
           <a:solidFill>
@@ -12075,11 +12075,11 @@
         <p:spPr>
           <a:xfrm>
             <a:off x="8247888" y="1965960"/>
-            <a:ext cx="3611880" cy="2834640"/>
+            <a:ext cx="3611880" cy="2514600"/>
           </a:xfrm>
           <a:prstGeom prst="roundRect">
             <a:avLst>
-              <a:gd name="adj" fmla="val 2903"/>
+              <a:gd name="adj" fmla="val 3272"/>
             </a:avLst>
           </a:prstGeom>
           <a:solidFill>
@@ -12262,12 +12262,12 @@
         </p:nvSpPr>
         <p:spPr>
           <a:xfrm>
-            <a:off x="566928" y="5074920"/>
-            <a:ext cx="11064240" cy="1691640"/>
+            <a:off x="566928" y="4846319"/>
+            <a:ext cx="11064240" cy="1572768"/>
           </a:xfrm>
           <a:prstGeom prst="roundRect">
             <a:avLst>
-              <a:gd name="adj" fmla="val 4864"/>
+              <a:gd name="adj" fmla="val 5232"/>
             </a:avLst>
           </a:prstGeom>
           <a:solidFill>
@@ -12310,8 +12310,8 @@
         </p:nvSpPr>
         <p:spPr>
           <a:xfrm>
-            <a:off x="566928" y="5074920"/>
-            <a:ext cx="45720" cy="1691640"/>
+            <a:off x="566928" y="4846319"/>
+            <a:ext cx="45720" cy="1572768"/>
           </a:xfrm>
           <a:prstGeom prst="rect">
             <a:avLst/>
@@ -12354,7 +12354,7 @@
         </p:nvSpPr>
         <p:spPr>
           <a:xfrm>
-            <a:off x="859536" y="5294376"/>
+            <a:off x="859536" y="5065775"/>
             <a:ext cx="10424160" cy="320040"/>
           </a:xfrm>
           <a:prstGeom prst="rect">
@@ -12389,7 +12389,7 @@
         </p:nvSpPr>
         <p:spPr>
           <a:xfrm>
-            <a:off x="859536" y="5696712"/>
+            <a:off x="859536" y="5468111"/>
             <a:ext cx="10424160" cy="274320"/>
           </a:xfrm>
           <a:prstGeom prst="rect">
@@ -12424,7 +12424,7 @@
         </p:nvSpPr>
         <p:spPr>
           <a:xfrm>
-            <a:off x="859536" y="5971031"/>
+            <a:off x="859536" y="5742431"/>
             <a:ext cx="10424160" cy="274320"/>
           </a:xfrm>
           <a:prstGeom prst="rect">
@@ -12459,7 +12459,7 @@
         </p:nvSpPr>
         <p:spPr>
           <a:xfrm>
-            <a:off x="859536" y="6245351"/>
+            <a:off x="859536" y="6016751"/>
             <a:ext cx="10424160" cy="274320"/>
           </a:xfrm>
           <a:prstGeom prst="rect">
@@ -12529,8 +12529,8 @@
         </p:nvSpPr>
         <p:spPr>
           <a:xfrm>
-            <a:off x="8778240" y="6528816"/>
-            <a:ext cx="2834640" cy="228600"/>
+            <a:off x="7498079" y="6528816"/>
+            <a:ext cx="4114800" cy="228600"/>
           </a:xfrm>
           <a:prstGeom prst="rect">
             <a:avLst/>
@@ -12551,7 +12551,7 @@
                 </a:solidFill>
                 <a:latin typeface="JetBrains Mono"/>
               </a:rPr>
-              <a:t>Vector Prediction · Hermes · Osmosy</a:t>
+              <a:t>Vector Prediction · Hermes Agent · Osmosy</a:t>
             </a:r>
           </a:p>
         </p:txBody>
@@ -12950,7 +12950,7 @@
                 </a:solidFill>
                 <a:latin typeface="Inter"/>
               </a:rPr>
-              <a:t>Продажи выгружают историю,</a:t>
+              <a:t>Продажи: история.</a:t>
             </a:r>
           </a:p>
         </p:txBody>
@@ -12985,7 +12985,7 @@
                 </a:solidFill>
                 <a:latin typeface="Inter"/>
               </a:rPr>
-              <a:t>маркетолог даёт план промо</a:t>
+              <a:t>Маркетолог: план промо</a:t>
             </a:r>
           </a:p>
         </p:txBody>
@@ -13235,7 +13235,7 @@
                 </a:solidFill>
                 <a:latin typeface="Inter"/>
               </a:rPr>
-              <a:t>склейка CSV, preflight системы</a:t>
+              <a:t>склейка CSV, preflight</a:t>
             </a:r>
           </a:p>
         </p:txBody>
@@ -13450,7 +13450,7 @@
                 </a:solidFill>
                 <a:latin typeface="Inter"/>
               </a:rPr>
-              <a:t>Контур A: интервалы 60/80%,</a:t>
+              <a:t>Контур A: интервалы</a:t>
             </a:r>
           </a:p>
         </p:txBody>
@@ -13485,7 +13485,7 @@
                 </a:solidFill>
                 <a:latin typeface="Inter"/>
               </a:rPr>
-              <a:t>аномалии, метрики на holdout</a:t>
+              <a:t>60/80%, аномалии, holdout</a:t>
             </a:r>
           </a:p>
         </p:txBody>
@@ -13735,7 +13735,7 @@
                 </a:solidFill>
                 <a:latin typeface="Inter"/>
               </a:rPr>
-              <a:t>директор планирует по цифрам</a:t>
+              <a:t>директор планирует</a:t>
             </a:r>
           </a:p>
         </p:txBody>
@@ -14015,8 +14015,8 @@
         </p:nvSpPr>
         <p:spPr>
           <a:xfrm>
-            <a:off x="8778240" y="6528816"/>
-            <a:ext cx="2834640" cy="228600"/>
+            <a:off x="7498079" y="6528816"/>
+            <a:ext cx="4114800" cy="228600"/>
           </a:xfrm>
           <a:prstGeom prst="rect">
             <a:avLst/>
@@ -14037,7 +14037,7 @@
                 </a:solidFill>
                 <a:latin typeface="JetBrains Mono"/>
               </a:rPr>
-              <a:t>Vector Prediction · Hermes · Osmosy</a:t>
+              <a:t>Vector Prediction · Hermes Agent · Osmosy</a:t>
             </a:r>
           </a:p>
         </p:txBody>
@@ -14279,11 +14279,11 @@
         <p:spPr>
           <a:xfrm>
             <a:off x="566928" y="2011680"/>
-            <a:ext cx="11064240" cy="1417320"/>
+            <a:ext cx="11064240" cy="1024128"/>
           </a:xfrm>
           <a:prstGeom prst="roundRect">
             <a:avLst>
-              <a:gd name="adj" fmla="val 5806"/>
+              <a:gd name="adj" fmla="val 8035"/>
             </a:avLst>
           </a:prstGeom>
           <a:solidFill>
@@ -14327,7 +14327,7 @@
         <p:spPr>
           <a:xfrm>
             <a:off x="566928" y="2011680"/>
-            <a:ext cx="45720" cy="1417320"/>
+            <a:ext cx="45720" cy="1024128"/>
           </a:xfrm>
           <a:prstGeom prst="rect">
             <a:avLst/>
@@ -14440,12 +14440,12 @@
         </p:nvSpPr>
         <p:spPr>
           <a:xfrm>
-            <a:off x="566928" y="3593592"/>
-            <a:ext cx="11064240" cy="1417320"/>
+            <a:off x="566928" y="3200400"/>
+            <a:ext cx="11064240" cy="1024128"/>
           </a:xfrm>
           <a:prstGeom prst="roundRect">
             <a:avLst>
-              <a:gd name="adj" fmla="val 5806"/>
+              <a:gd name="adj" fmla="val 8035"/>
             </a:avLst>
           </a:prstGeom>
           <a:solidFill>
@@ -14488,8 +14488,8 @@
         </p:nvSpPr>
         <p:spPr>
           <a:xfrm>
-            <a:off x="566928" y="3593592"/>
-            <a:ext cx="45720" cy="1417320"/>
+            <a:off x="566928" y="3200400"/>
+            <a:ext cx="45720" cy="1024128"/>
           </a:xfrm>
           <a:prstGeom prst="rect">
             <a:avLst/>
@@ -14532,7 +14532,7 @@
         </p:nvSpPr>
         <p:spPr>
           <a:xfrm>
-            <a:off x="859536" y="3813048"/>
+            <a:off x="859536" y="3419856"/>
             <a:ext cx="10424160" cy="320040"/>
           </a:xfrm>
           <a:prstGeom prst="rect">
@@ -14567,7 +14567,7 @@
         </p:nvSpPr>
         <p:spPr>
           <a:xfrm>
-            <a:off x="859536" y="4215384"/>
+            <a:off x="859536" y="3822192"/>
             <a:ext cx="10424160" cy="274320"/>
           </a:xfrm>
           <a:prstGeom prst="rect">
@@ -14602,12 +14602,12 @@
         </p:nvSpPr>
         <p:spPr>
           <a:xfrm>
-            <a:off x="566928" y="5175504"/>
-            <a:ext cx="11064240" cy="1691640"/>
+            <a:off x="566928" y="4389120"/>
+            <a:ext cx="11064240" cy="1197864"/>
           </a:xfrm>
           <a:prstGeom prst="roundRect">
             <a:avLst>
-              <a:gd name="adj" fmla="val 4864"/>
+              <a:gd name="adj" fmla="val 6870"/>
             </a:avLst>
           </a:prstGeom>
           <a:solidFill>
@@ -14650,8 +14650,8 @@
         </p:nvSpPr>
         <p:spPr>
           <a:xfrm>
-            <a:off x="566928" y="5175504"/>
-            <a:ext cx="45720" cy="1691640"/>
+            <a:off x="566928" y="4389120"/>
+            <a:ext cx="45720" cy="1197864"/>
           </a:xfrm>
           <a:prstGeom prst="rect">
             <a:avLst/>
@@ -14694,7 +14694,7 @@
         </p:nvSpPr>
         <p:spPr>
           <a:xfrm>
-            <a:off x="859536" y="5394960"/>
+            <a:off x="859536" y="4608576"/>
             <a:ext cx="10424160" cy="320040"/>
           </a:xfrm>
           <a:prstGeom prst="rect">
@@ -14729,8 +14729,8 @@
         </p:nvSpPr>
         <p:spPr>
           <a:xfrm>
-            <a:off x="859536" y="5797296"/>
-            <a:ext cx="10424160" cy="274320"/>
+            <a:off x="859536" y="5010912"/>
+            <a:ext cx="10424160" cy="448056"/>
           </a:xfrm>
           <a:prstGeom prst="rect">
             <a:avLst/>
@@ -14799,8 +14799,8 @@
         </p:nvSpPr>
         <p:spPr>
           <a:xfrm>
-            <a:off x="8778240" y="6528816"/>
-            <a:ext cx="2834640" cy="228600"/>
+            <a:off x="7498079" y="6528816"/>
+            <a:ext cx="4114800" cy="228600"/>
           </a:xfrm>
           <a:prstGeom prst="rect">
             <a:avLst/>
@@ -14821,7 +14821,7 @@
                 </a:solidFill>
                 <a:latin typeface="JetBrains Mono"/>
               </a:rPr>
-              <a:t>Vector Prediction · Hermes · Osmosy</a:t>
+              <a:t>Vector Prediction · Hermes Agent · Osmosy</a:t>
             </a:r>
           </a:p>
         </p:txBody>
@@ -15063,11 +15063,11 @@
         <p:spPr>
           <a:xfrm>
             <a:off x="566928" y="1965960"/>
-            <a:ext cx="3611880" cy="2834640"/>
+            <a:ext cx="3611880" cy="2743200"/>
           </a:xfrm>
           <a:prstGeom prst="roundRect">
             <a:avLst>
-              <a:gd name="adj" fmla="val 2903"/>
+              <a:gd name="adj" fmla="val 3000"/>
             </a:avLst>
           </a:prstGeom>
           <a:solidFill>
@@ -15286,11 +15286,11 @@
         <p:spPr>
           <a:xfrm>
             <a:off x="4407408" y="1965960"/>
-            <a:ext cx="3611880" cy="2834640"/>
+            <a:ext cx="3611880" cy="2743200"/>
           </a:xfrm>
           <a:prstGeom prst="roundRect">
             <a:avLst>
-              <a:gd name="adj" fmla="val 2903"/>
+              <a:gd name="adj" fmla="val 3000"/>
             </a:avLst>
           </a:prstGeom>
           <a:solidFill>
@@ -15509,11 +15509,11 @@
         <p:spPr>
           <a:xfrm>
             <a:off x="8247888" y="1965960"/>
-            <a:ext cx="3611880" cy="2834640"/>
+            <a:ext cx="3611880" cy="2743200"/>
           </a:xfrm>
           <a:prstGeom prst="roundRect">
             <a:avLst>
-              <a:gd name="adj" fmla="val 2903"/>
+              <a:gd name="adj" fmla="val 3000"/>
             </a:avLst>
           </a:prstGeom>
           <a:solidFill>
@@ -15731,12 +15731,12 @@
         </p:nvSpPr>
         <p:spPr>
           <a:xfrm>
-            <a:off x="566928" y="5074920"/>
-            <a:ext cx="11064240" cy="1554480"/>
+            <a:off x="566928" y="5120640"/>
+            <a:ext cx="11064240" cy="1298448"/>
           </a:xfrm>
           <a:prstGeom prst="roundRect">
             <a:avLst>
-              <a:gd name="adj" fmla="val 5294"/>
+              <a:gd name="adj" fmla="val 6338"/>
             </a:avLst>
           </a:prstGeom>
           <a:solidFill>
@@ -15779,8 +15779,8 @@
         </p:nvSpPr>
         <p:spPr>
           <a:xfrm>
-            <a:off x="566928" y="5074920"/>
-            <a:ext cx="45720" cy="1554480"/>
+            <a:off x="566928" y="5120640"/>
+            <a:ext cx="45720" cy="1298448"/>
           </a:xfrm>
           <a:prstGeom prst="rect">
             <a:avLst/>
@@ -15823,7 +15823,7 @@
         </p:nvSpPr>
         <p:spPr>
           <a:xfrm>
-            <a:off x="859536" y="5294376"/>
+            <a:off x="859536" y="5340096"/>
             <a:ext cx="10424160" cy="320040"/>
           </a:xfrm>
           <a:prstGeom prst="rect">
@@ -15858,7 +15858,7 @@
         </p:nvSpPr>
         <p:spPr>
           <a:xfrm>
-            <a:off x="859536" y="5696712"/>
+            <a:off x="859536" y="5742431"/>
             <a:ext cx="10424160" cy="274320"/>
           </a:xfrm>
           <a:prstGeom prst="rect">
@@ -15893,7 +15893,7 @@
         </p:nvSpPr>
         <p:spPr>
           <a:xfrm>
-            <a:off x="859536" y="5971031"/>
+            <a:off x="859536" y="6016751"/>
             <a:ext cx="10424160" cy="274320"/>
           </a:xfrm>
           <a:prstGeom prst="rect">
@@ -15963,8 +15963,8 @@
         </p:nvSpPr>
         <p:spPr>
           <a:xfrm>
-            <a:off x="8778240" y="6528816"/>
-            <a:ext cx="2834640" cy="228600"/>
+            <a:off x="7498079" y="6528816"/>
+            <a:ext cx="4114800" cy="228600"/>
           </a:xfrm>
           <a:prstGeom prst="rect">
             <a:avLst/>
@@ -15985,7 +15985,7 @@
                 </a:solidFill>
                 <a:latin typeface="JetBrains Mono"/>
               </a:rPr>
-              <a:t>Vector Prediction · Hermes · Osmosy</a:t>
+              <a:t>Vector Prediction · Hermes Agent · Osmosy</a:t>
             </a:r>
           </a:p>
         </p:txBody>
@@ -17341,12 +17341,12 @@
         </p:nvSpPr>
         <p:spPr>
           <a:xfrm>
-            <a:off x="566928" y="4846320"/>
-            <a:ext cx="11064240" cy="1783080"/>
+            <a:off x="566928" y="4846319"/>
+            <a:ext cx="11064240" cy="1572768"/>
           </a:xfrm>
           <a:prstGeom prst="roundRect">
             <a:avLst>
-              <a:gd name="adj" fmla="val 4615"/>
+              <a:gd name="adj" fmla="val 5232"/>
             </a:avLst>
           </a:prstGeom>
           <a:solidFill>
@@ -17389,8 +17389,8 @@
         </p:nvSpPr>
         <p:spPr>
           <a:xfrm>
-            <a:off x="566928" y="4846320"/>
-            <a:ext cx="45720" cy="1783080"/>
+            <a:off x="566928" y="4846319"/>
+            <a:ext cx="45720" cy="1572768"/>
           </a:xfrm>
           <a:prstGeom prst="rect">
             <a:avLst/>
@@ -17433,7 +17433,7 @@
         </p:nvSpPr>
         <p:spPr>
           <a:xfrm>
-            <a:off x="859536" y="5065776"/>
+            <a:off x="859536" y="5065775"/>
             <a:ext cx="10424160" cy="320040"/>
           </a:xfrm>
           <a:prstGeom prst="rect">
@@ -17468,7 +17468,7 @@
         </p:nvSpPr>
         <p:spPr>
           <a:xfrm>
-            <a:off x="859536" y="5468112"/>
+            <a:off x="859536" y="5468111"/>
             <a:ext cx="10424160" cy="274320"/>
           </a:xfrm>
           <a:prstGeom prst="rect">
@@ -17608,8 +17608,8 @@
         </p:nvSpPr>
         <p:spPr>
           <a:xfrm>
-            <a:off x="8778240" y="6528816"/>
-            <a:ext cx="2834640" cy="228600"/>
+            <a:off x="7498079" y="6528816"/>
+            <a:ext cx="4114800" cy="228600"/>
           </a:xfrm>
           <a:prstGeom prst="rect">
             <a:avLst/>
@@ -17630,7 +17630,7 @@
                 </a:solidFill>
                 <a:latin typeface="JetBrains Mono"/>
               </a:rPr>
-              <a:t>Vector Prediction · Hermes · Osmosy</a:t>
+              <a:t>Vector Prediction · Hermes Agent · Osmosy</a:t>
             </a:r>
           </a:p>
         </p:txBody>

--- a/docs/vector-prediction-obsidian-neon.pptx
+++ b/docs/vector-prediction-obsidian-neon.pptx
@@ -3102,7 +3102,7 @@
       <p:grpSpPr/>
       <p:pic>
         <p:nvPicPr>
-          <p:cNvPr id="2" name="Picture 1" descr="title_hero.png"/>
+          <p:cNvPr id="2" name="Picture 1" descr="prediction_hero.png"/>
           <p:cNvPicPr>
             <a:picLocks noChangeAspect="1"/>
           </p:cNvPicPr>
@@ -3683,7 +3683,7 @@
                 </a:solidFill>
                 <a:latin typeface="Inter Display"/>
               </a:rPr>
-              <a:t>~5x</a:t>
+              <a:t>~6x</a:t>
             </a:r>
           </a:p>
         </p:txBody>
@@ -13748,12 +13748,12 @@
         </p:nvSpPr>
         <p:spPr>
           <a:xfrm>
-            <a:off x="758952" y="4297680"/>
-            <a:ext cx="10671048" cy="1920240"/>
+            <a:off x="758952" y="4846319"/>
+            <a:ext cx="10671048" cy="1572768"/>
           </a:xfrm>
           <a:prstGeom prst="roundRect">
             <a:avLst>
-              <a:gd name="adj" fmla="val 4285"/>
+              <a:gd name="adj" fmla="val 5232"/>
             </a:avLst>
           </a:prstGeom>
           <a:solidFill>
@@ -13796,8 +13796,8 @@
         </p:nvSpPr>
         <p:spPr>
           <a:xfrm>
-            <a:off x="758952" y="4297680"/>
-            <a:ext cx="45720" cy="1920240"/>
+            <a:off x="758952" y="4846319"/>
+            <a:ext cx="45720" cy="1572768"/>
           </a:xfrm>
           <a:prstGeom prst="rect">
             <a:avLst/>
@@ -13840,7 +13840,7 @@
         </p:nvSpPr>
         <p:spPr>
           <a:xfrm>
-            <a:off x="1051560" y="4517136"/>
+            <a:off x="1051560" y="5065775"/>
             <a:ext cx="10030968" cy="320040"/>
           </a:xfrm>
           <a:prstGeom prst="rect">
@@ -13875,7 +13875,7 @@
         </p:nvSpPr>
         <p:spPr>
           <a:xfrm>
-            <a:off x="1051560" y="4919472"/>
+            <a:off x="1051560" y="5468111"/>
             <a:ext cx="10030968" cy="274320"/>
           </a:xfrm>
           <a:prstGeom prst="rect">
@@ -13910,7 +13910,7 @@
         </p:nvSpPr>
         <p:spPr>
           <a:xfrm>
-            <a:off x="1051560" y="5193792"/>
+            <a:off x="1051560" y="5742431"/>
             <a:ext cx="10030968" cy="274320"/>
           </a:xfrm>
           <a:prstGeom prst="rect">
@@ -13945,7 +13945,7 @@
         </p:nvSpPr>
         <p:spPr>
           <a:xfrm>
-            <a:off x="1051560" y="5468112"/>
+            <a:off x="1051560" y="6016751"/>
             <a:ext cx="10030968" cy="274320"/>
           </a:xfrm>
           <a:prstGeom prst="rect">
@@ -14589,7 +14589,7 @@
                 </a:solidFill>
                 <a:latin typeface="Inter"/>
               </a:rPr>
-              <a:t>research_bench.py: нативная мультисерийность, past-future ковариаты за один проход (~5x быстрее), 9 квантилей</a:t>
+              <a:t>research_bench.py: нативная мультисерийность, past-future ковариаты за один проход (~6x быстрее), 9 квантилей</a:t>
             </a:r>
           </a:p>
         </p:txBody>
@@ -16777,7 +16777,7 @@
                 </a:solidFill>
                 <a:latin typeface="JetBrains Mono"/>
               </a:rPr>
-              <a:t>0.15 с</a:t>
+              <a:t>0.17 с</a:t>
             </a:r>
           </a:p>
         </p:txBody>
@@ -16812,7 +16812,7 @@
                 </a:solidFill>
                 <a:latin typeface="JetBrains Mono"/>
               </a:rPr>
-              <a:t>1.29 с</a:t>
+              <a:t>1.30 с</a:t>
             </a:r>
           </a:p>
         </p:txBody>
@@ -16847,7 +16847,7 @@
                 </a:solidFill>
                 <a:latin typeface="JetBrains Mono"/>
               </a:rPr>
-              <a:t>0.22 с</a:t>
+              <a:t>0.20 с</a:t>
             </a:r>
           </a:p>
         </p:txBody>
@@ -16882,7 +16882,7 @@
                 </a:solidFill>
                 <a:latin typeface="JetBrains Mono"/>
               </a:rPr>
-              <a:t>0.24 с</a:t>
+              <a:t>0.22 с</a:t>
             </a:r>
           </a:p>
         </p:txBody>
@@ -17490,7 +17490,7 @@
                 </a:solidFill>
                 <a:latin typeface="Inter"/>
               </a:rPr>
-              <a:t>Вывод: на ряде из репо точнее 2.5 + XReg (MAE 31.42 против 40.55 у 3.0 с ковариатом); 3.0 быстрее в ковариатном прогнозе (~5x).</a:t>
+              <a:t>Вывод: на ряде из репо точнее 2.5 + XReg (MAE 31.42 против 40.55 у 3.0 с ковариатом); 3.0 быстрее в ковариатном прогнозе (~6x).</a:t>
             </a:r>
           </a:p>
         </p:txBody>
@@ -17560,7 +17560,7 @@
                 </a:solidFill>
                 <a:latin typeface="Inter"/>
               </a:rPr>
-              <a:t>Повторить: research_bench.py --input data/sample/history.csv --value-col clicks (04.09.2026, Ryzen AI 9 H 365, 20 CPU).</a:t>
+              <a:t>Повторить: research_bench.py --input data/sample/history.csv --value-col clicks (27.09.2026, Ryzen AI 9 H 365, 20 CPU).</a:t>
             </a:r>
           </a:p>
         </p:txBody>

--- a/docs/vector-prediction-obsidian-neon.pptx
+++ b/docs/vector-prediction-obsidian-neon.pptx
@@ -3126,6 +3126,54 @@
       </p:pic>
       <p:sp>
         <p:nvSpPr>
+          <p:cNvPr id="20" name="Rounded Rectangle 19"/>
+          <p:cNvSpPr/>
+          <p:nvPr/>
+        </p:nvSpPr>
+        <p:spPr>
+          <a:xfrm>
+            <a:off x="3611879" y="6245352"/>
+            <a:ext cx="4974336" cy="365760"/>
+          </a:xfrm>
+          <a:prstGeom prst="roundRect">
+            <a:avLst>
+              <a:gd name="adj" fmla="val 50000"/>
+            </a:avLst>
+          </a:prstGeom>
+          <a:solidFill>
+            <a:srgbClr val="0B1220">
+              <a:alpha val="97000"/>
+            </a:srgbClr>
+          </a:solidFill>
+          <a:ln>
+            <a:noFill/>
+          </a:ln>
+          <a:effectLst/>
+        </p:spPr>
+        <p:style>
+          <a:lnRef idx="1">
+            <a:schemeClr val="accent1"/>
+          </a:lnRef>
+          <a:fillRef idx="3">
+            <a:schemeClr val="accent1"/>
+          </a:fillRef>
+          <a:effectRef idx="2">
+            <a:schemeClr val="accent1"/>
+          </a:effectRef>
+          <a:fontRef idx="minor">
+            <a:schemeClr val="lt1"/>
+          </a:fontRef>
+        </p:style>
+        <p:txBody>
+          <a:bodyPr rtlCol="0" anchor="ctr"/>
+          <a:lstStyle/>
+          <a:p>
+            <a:pPr algn="ctr"/>
+          </a:p>
+        </p:txBody>
+      </p:sp>
+      <p:sp>
+        <p:nvSpPr>
           <p:cNvPr id="3" name="Rectangle 2"/>
           <p:cNvSpPr/>
           <p:nvPr/>
@@ -3806,7 +3854,7 @@
       </p:sp>
       <p:sp>
         <p:nvSpPr>
-          <p:cNvPr id="20" name="TextBox 19"/>
+          <p:cNvPr id="21" name="TextBox 20"/>
           <p:cNvSpPr txBox="1"/>
           <p:nvPr/>
         </p:nvSpPr>
@@ -3841,7 +3889,7 @@
       </p:sp>
       <p:pic>
         <p:nvPicPr>
-          <p:cNvPr id="21" name="Picture 20" descr="vector_ray_t.png"/>
+          <p:cNvPr id="22" name="Picture 21" descr="vector_ray_t.png"/>
           <p:cNvPicPr>
             <a:picLocks noChangeAspect="1"/>
           </p:cNvPicPr>
